--- a/Lesson_development/Presentations/structural.pptx
+++ b/Lesson_development/Presentations/structural.pptx
@@ -141,7 +141,7 @@
 <file path=ppt/revisionInfo.xml><?xml version="1.0" encoding="utf-8"?>
 <p1510:revInfo xmlns:a="http://schemas.openxmlformats.org/drawingml/2006/main" xmlns:r="http://schemas.openxmlformats.org/officeDocument/2006/relationships" xmlns:p1510="http://schemas.microsoft.com/office/powerpoint/2015/10/main">
   <p1510:revLst>
-    <p1510:client id="{C8707E85-D247-4D31-8D05-321D7ECB2773}" v="305" dt="2026-09-22T12:14:52.786"/>
+    <p1510:client id="{C8707E85-D247-4D31-8D05-321D7ECB2773}" v="311" dt="2026-09-23T07:08:54.491"/>
   </p1510:revLst>
 </p1510:revInfo>
 </file>
@@ -151,7 +151,7 @@
   <pc:docChgLst>
     <pc:chgData name="Leila Iñigo de la Cruz" userId="fae4ed0d-52e1-4e8b-ac73-77e0b7235c9a" providerId="ADAL" clId="{1E9E03C1-E5D4-4BEC-8EBD-C4DD5262B379}"/>
     <pc:docChg chg="undo custSel addSld delSld modSld">
-      <pc:chgData name="Leila Iñigo de la Cruz" userId="fae4ed0d-52e1-4e8b-ac73-77e0b7235c9a" providerId="ADAL" clId="{1E9E03C1-E5D4-4BEC-8EBD-C4DD5262B379}" dt="2026-09-22T12:22:09.485" v="2236" actId="2696"/>
+      <pc:chgData name="Leila Iñigo de la Cruz" userId="fae4ed0d-52e1-4e8b-ac73-77e0b7235c9a" providerId="ADAL" clId="{1E9E03C1-E5D4-4BEC-8EBD-C4DD5262B379}" dt="2026-09-23T07:08:10.110" v="2358" actId="1035"/>
       <pc:docMkLst>
         <pc:docMk/>
       </pc:docMkLst>
@@ -347,8 +347,8 @@
           <pc:sldMk cId="340876911" sldId="322"/>
         </pc:sldMkLst>
       </pc:sldChg>
-      <pc:sldChg chg="addSp delSp modSp mod">
-        <pc:chgData name="Leila Iñigo de la Cruz" userId="fae4ed0d-52e1-4e8b-ac73-77e0b7235c9a" providerId="ADAL" clId="{1E9E03C1-E5D4-4BEC-8EBD-C4DD5262B379}" dt="2026-09-22T09:34:20.259" v="312" actId="1076"/>
+      <pc:sldChg chg="addSp delSp modSp mod modAnim">
+        <pc:chgData name="Leila Iñigo de la Cruz" userId="fae4ed0d-52e1-4e8b-ac73-77e0b7235c9a" providerId="ADAL" clId="{1E9E03C1-E5D4-4BEC-8EBD-C4DD5262B379}" dt="2026-09-23T07:04:20.692" v="2237"/>
         <pc:sldMkLst>
           <pc:docMk/>
           <pc:sldMk cId="3584046850" sldId="327"/>
@@ -545,8 +545,8 @@
           <pc:sldMk cId="1149832908" sldId="328"/>
         </pc:sldMkLst>
       </pc:sldChg>
-      <pc:sldChg chg="addSp delSp modSp add mod delAnim">
-        <pc:chgData name="Leila Iñigo de la Cruz" userId="fae4ed0d-52e1-4e8b-ac73-77e0b7235c9a" providerId="ADAL" clId="{1E9E03C1-E5D4-4BEC-8EBD-C4DD5262B379}" dt="2026-09-22T09:57:21.373" v="1134" actId="1076"/>
+      <pc:sldChg chg="addSp delSp modSp add mod delAnim modAnim">
+        <pc:chgData name="Leila Iñigo de la Cruz" userId="fae4ed0d-52e1-4e8b-ac73-77e0b7235c9a" providerId="ADAL" clId="{1E9E03C1-E5D4-4BEC-8EBD-C4DD5262B379}" dt="2026-09-23T07:05:13.772" v="2242"/>
         <pc:sldMkLst>
           <pc:docMk/>
           <pc:sldMk cId="3670711026" sldId="329"/>
@@ -584,7 +584,7 @@
           </ac:spMkLst>
         </pc:spChg>
         <pc:spChg chg="add mod">
-          <ac:chgData name="Leila Iñigo de la Cruz" userId="fae4ed0d-52e1-4e8b-ac73-77e0b7235c9a" providerId="ADAL" clId="{1E9E03C1-E5D4-4BEC-8EBD-C4DD5262B379}" dt="2026-09-22T09:55:42.863" v="1069" actId="20577"/>
+          <ac:chgData name="Leila Iñigo de la Cruz" userId="fae4ed0d-52e1-4e8b-ac73-77e0b7235c9a" providerId="ADAL" clId="{1E9E03C1-E5D4-4BEC-8EBD-C4DD5262B379}" dt="2026-09-23T07:04:44.112" v="2239" actId="20577"/>
           <ac:spMkLst>
             <pc:docMk/>
             <pc:sldMk cId="3670711026" sldId="329"/>
@@ -760,8 +760,8 @@
           </ac:cxnSpMkLst>
         </pc:cxnChg>
       </pc:sldChg>
-      <pc:sldChg chg="addSp delSp modSp add mod modAnim">
-        <pc:chgData name="Leila Iñigo de la Cruz" userId="fae4ed0d-52e1-4e8b-ac73-77e0b7235c9a" providerId="ADAL" clId="{1E9E03C1-E5D4-4BEC-8EBD-C4DD5262B379}" dt="2026-09-22T11:21:05.589" v="1627" actId="555"/>
+      <pc:sldChg chg="addSp delSp modSp add mod modAnim modNotesTx">
+        <pc:chgData name="Leila Iñigo de la Cruz" userId="fae4ed0d-52e1-4e8b-ac73-77e0b7235c9a" providerId="ADAL" clId="{1E9E03C1-E5D4-4BEC-8EBD-C4DD5262B379}" dt="2026-09-23T07:06:34.281" v="2347" actId="20577"/>
         <pc:sldMkLst>
           <pc:docMk/>
           <pc:sldMk cId="2954123681" sldId="330"/>
@@ -824,7 +824,7 @@
         </pc:spChg>
       </pc:sldChg>
       <pc:sldChg chg="addSp delSp modSp add mod delAnim">
-        <pc:chgData name="Leila Iñigo de la Cruz" userId="fae4ed0d-52e1-4e8b-ac73-77e0b7235c9a" providerId="ADAL" clId="{1E9E03C1-E5D4-4BEC-8EBD-C4DD5262B379}" dt="2026-09-22T11:10:26.428" v="1558" actId="22"/>
+        <pc:chgData name="Leila Iñigo de la Cruz" userId="fae4ed0d-52e1-4e8b-ac73-77e0b7235c9a" providerId="ADAL" clId="{1E9E03C1-E5D4-4BEC-8EBD-C4DD5262B379}" dt="2026-09-23T07:08:10.110" v="2358" actId="1035"/>
         <pc:sldMkLst>
           <pc:docMk/>
           <pc:sldMk cId="3485587456" sldId="331"/>
@@ -901,8 +901,8 @@
             <ac:spMk id="14" creationId="{403C4A95-6FC8-7452-C93D-A38872F05F41}"/>
           </ac:spMkLst>
         </pc:spChg>
-        <pc:picChg chg="add">
-          <ac:chgData name="Leila Iñigo de la Cruz" userId="fae4ed0d-52e1-4e8b-ac73-77e0b7235c9a" providerId="ADAL" clId="{1E9E03C1-E5D4-4BEC-8EBD-C4DD5262B379}" dt="2026-09-22T11:10:26.428" v="1558" actId="22"/>
+        <pc:picChg chg="add mod modCrop">
+          <ac:chgData name="Leila Iñigo de la Cruz" userId="fae4ed0d-52e1-4e8b-ac73-77e0b7235c9a" providerId="ADAL" clId="{1E9E03C1-E5D4-4BEC-8EBD-C4DD5262B379}" dt="2026-09-23T07:08:10.110" v="2358" actId="1035"/>
           <ac:picMkLst>
             <pc:docMk/>
             <pc:sldMk cId="3485587456" sldId="331"/>
@@ -1209,7 +1209,7 @@
           <a:p>
             <a:fld id="{4CDBE7BC-106D-4B03-9183-ECAC3B45AFC3}" type="datetimeFigureOut">
               <a:rPr lang="nl-NL" smtClean="0"/>
-              <a:t>22-9-2026</a:t>
+              <a:t>23-9-2026</a:t>
             </a:fld>
             <a:endParaRPr lang="nl-NL"/>
           </a:p>
@@ -7408,6 +7408,29 @@
           </a:bodyPr>
           <a:lstStyle/>
           <a:p>
+            <a:pPr marL="0" marR="0" lvl="0" indent="0" algn="l" defTabSz="914400" rtl="0" eaLnBrk="1" fontAlgn="auto" latinLnBrk="0" hangingPunct="1">
+              <a:lnSpc>
+                <a:spcPct val="100000"/>
+              </a:lnSpc>
+              <a:spcBef>
+                <a:spcPts val="0"/>
+              </a:spcBef>
+              <a:spcAft>
+                <a:spcPts val="0"/>
+              </a:spcAft>
+              <a:buClrTx/>
+              <a:buSzPts val="1400"/>
+              <a:buFontTx/>
+              <a:buNone/>
+              <a:tabLst/>
+              <a:defRPr/>
+            </a:pPr>
+            <a:r>
+              <a:rPr lang="en-US" dirty="0"/>
+              <a:t>Example of a dataset : Forecast data for 5 variables in 10 pressure levels and 24 time steps </a:t>
+            </a:r>
+          </a:p>
+          <a:p>
             <a:pPr marL="0" lvl="0" indent="0" algn="l" rtl="0">
               <a:lnSpc>
                 <a:spcPct val="100000"/>
@@ -8952,7 +8975,7 @@
           <a:p>
             <a:fld id="{6FB2F65A-CA80-4036-A1DE-2EDF1F345BB4}" type="datetimeFigureOut">
               <a:rPr lang="en-GB" smtClean="0"/>
-              <a:t>22/09/2026</a:t>
+              <a:t>23/09/2026</a:t>
             </a:fld>
             <a:endParaRPr lang="en-GB"/>
           </a:p>
@@ -15899,7 +15922,7 @@
           <a:p>
             <a:fld id="{6FB2F65A-CA80-4036-A1DE-2EDF1F345BB4}" type="datetimeFigureOut">
               <a:rPr lang="en-GB" smtClean="0"/>
-              <a:t>22/09/2026</a:t>
+              <a:t>23/09/2026</a:t>
             </a:fld>
             <a:endParaRPr lang="en-GB"/>
           </a:p>
@@ -16069,7 +16092,7 @@
           <a:p>
             <a:fld id="{6FB2F65A-CA80-4036-A1DE-2EDF1F345BB4}" type="datetimeFigureOut">
               <a:rPr lang="en-GB" smtClean="0"/>
-              <a:t>22/09/2026</a:t>
+              <a:t>23/09/2026</a:t>
             </a:fld>
             <a:endParaRPr lang="en-GB"/>
           </a:p>
@@ -18803,7 +18826,7 @@
     </p:tnLst>
     <p:bldLst>
       <p:bldP spid="4" grpId="0" build="p"/>
-      <p:bldP spid="6" grpId="0"/>
+      <p:bldP spid="6" grpId="0" animBg="1"/>
     </p:bldLst>
   </p:timing>
 </p:sld>
@@ -23662,92 +23685,6 @@
   <p:clrMapOvr>
     <a:masterClrMapping/>
   </p:clrMapOvr>
-  <p:timing>
-    <p:tnLst>
-      <p:par>
-        <p:cTn id="1" dur="indefinite" restart="never" nodeType="tmRoot">
-          <p:childTnLst>
-            <p:seq concurrent="1" nextAc="seek">
-              <p:cTn id="2" dur="indefinite" nodeType="mainSeq">
-                <p:childTnLst>
-                  <p:par>
-                    <p:cTn id="3" fill="hold">
-                      <p:stCondLst>
-                        <p:cond delay="indefinite"/>
-                      </p:stCondLst>
-                      <p:childTnLst>
-                        <p:par>
-                          <p:cTn id="4" fill="hold">
-                            <p:stCondLst>
-                              <p:cond delay="0"/>
-                            </p:stCondLst>
-                            <p:childTnLst>
-                              <p:par>
-                                <p:cTn id="5" presetID="10" presetClass="entr" presetSubtype="0" fill="hold" grpId="0" nodeType="clickEffect">
-                                  <p:stCondLst>
-                                    <p:cond delay="0"/>
-                                  </p:stCondLst>
-                                  <p:childTnLst>
-                                    <p:set>
-                                      <p:cBhvr>
-                                        <p:cTn id="6" dur="1" fill="hold">
-                                          <p:stCondLst>
-                                            <p:cond delay="0"/>
-                                          </p:stCondLst>
-                                        </p:cTn>
-                                        <p:tgtEl>
-                                          <p:spTgt spid="5"/>
-                                        </p:tgtEl>
-                                        <p:attrNameLst>
-                                          <p:attrName>style.visibility</p:attrName>
-                                        </p:attrNameLst>
-                                      </p:cBhvr>
-                                      <p:to>
-                                        <p:strVal val="visible"/>
-                                      </p:to>
-                                    </p:set>
-                                    <p:animEffect transition="in" filter="fade">
-                                      <p:cBhvr>
-                                        <p:cTn id="7" dur="500"/>
-                                        <p:tgtEl>
-                                          <p:spTgt spid="5"/>
-                                        </p:tgtEl>
-                                      </p:cBhvr>
-                                    </p:animEffect>
-                                  </p:childTnLst>
-                                </p:cTn>
-                              </p:par>
-                            </p:childTnLst>
-                          </p:cTn>
-                        </p:par>
-                      </p:childTnLst>
-                    </p:cTn>
-                  </p:par>
-                </p:childTnLst>
-              </p:cTn>
-              <p:prevCondLst>
-                <p:cond evt="onPrev" delay="0">
-                  <p:tgtEl>
-                    <p:sldTgt/>
-                  </p:tgtEl>
-                </p:cond>
-              </p:prevCondLst>
-              <p:nextCondLst>
-                <p:cond evt="onNext" delay="0">
-                  <p:tgtEl>
-                    <p:sldTgt/>
-                  </p:tgtEl>
-                </p:cond>
-              </p:nextCondLst>
-            </p:seq>
-          </p:childTnLst>
-        </p:cTn>
-      </p:par>
-    </p:tnLst>
-    <p:bldLst>
-      <p:bldP spid="5" grpId="0" animBg="1"/>
-    </p:bldLst>
-  </p:timing>
 </p:sld>
 </file>
 
@@ -23974,7 +23911,7 @@
                   <a:schemeClr val="tx1"/>
                 </a:solidFill>
               </a:rPr>
-              <a:t>If a dataset is structurally interoperable when different software tools can determine:</a:t>
+              <a:t>A dataset is structurally interoperable when different software tools can determine:</a:t>
             </a:r>
             <a:endParaRPr lang="nl-NL" dirty="0">
               <a:solidFill>
@@ -24605,6 +24542,398 @@
   <p:clrMapOvr>
     <a:masterClrMapping/>
   </p:clrMapOvr>
+  <p:timing>
+    <p:tnLst>
+      <p:par>
+        <p:cTn id="1" dur="indefinite" restart="never" nodeType="tmRoot">
+          <p:childTnLst>
+            <p:seq concurrent="1" nextAc="seek">
+              <p:cTn id="2" dur="indefinite" nodeType="mainSeq">
+                <p:childTnLst>
+                  <p:par>
+                    <p:cTn id="3" fill="hold">
+                      <p:stCondLst>
+                        <p:cond delay="indefinite"/>
+                      </p:stCondLst>
+                      <p:childTnLst>
+                        <p:par>
+                          <p:cTn id="4" fill="hold">
+                            <p:stCondLst>
+                              <p:cond delay="0"/>
+                            </p:stCondLst>
+                            <p:childTnLst>
+                              <p:par>
+                                <p:cTn id="5" presetID="10" presetClass="entr" presetSubtype="0" fill="hold" grpId="0" nodeType="clickEffect">
+                                  <p:stCondLst>
+                                    <p:cond delay="0"/>
+                                  </p:stCondLst>
+                                  <p:childTnLst>
+                                    <p:set>
+                                      <p:cBhvr>
+                                        <p:cTn id="6" dur="1" fill="hold">
+                                          <p:stCondLst>
+                                            <p:cond delay="0"/>
+                                          </p:stCondLst>
+                                        </p:cTn>
+                                        <p:tgtEl>
+                                          <p:spTgt spid="14">
+                                            <p:txEl>
+                                              <p:pRg st="0" end="0"/>
+                                            </p:txEl>
+                                          </p:spTgt>
+                                        </p:tgtEl>
+                                        <p:attrNameLst>
+                                          <p:attrName>style.visibility</p:attrName>
+                                        </p:attrNameLst>
+                                      </p:cBhvr>
+                                      <p:to>
+                                        <p:strVal val="visible"/>
+                                      </p:to>
+                                    </p:set>
+                                    <p:animEffect transition="in" filter="fade">
+                                      <p:cBhvr>
+                                        <p:cTn id="7" dur="500"/>
+                                        <p:tgtEl>
+                                          <p:spTgt spid="14">
+                                            <p:txEl>
+                                              <p:pRg st="0" end="0"/>
+                                            </p:txEl>
+                                          </p:spTgt>
+                                        </p:tgtEl>
+                                      </p:cBhvr>
+                                    </p:animEffect>
+                                  </p:childTnLst>
+                                </p:cTn>
+                              </p:par>
+                            </p:childTnLst>
+                          </p:cTn>
+                        </p:par>
+                      </p:childTnLst>
+                    </p:cTn>
+                  </p:par>
+                  <p:par>
+                    <p:cTn id="8" fill="hold">
+                      <p:stCondLst>
+                        <p:cond delay="indefinite"/>
+                      </p:stCondLst>
+                      <p:childTnLst>
+                        <p:par>
+                          <p:cTn id="9" fill="hold">
+                            <p:stCondLst>
+                              <p:cond delay="0"/>
+                            </p:stCondLst>
+                            <p:childTnLst>
+                              <p:par>
+                                <p:cTn id="10" presetID="10" presetClass="entr" presetSubtype="0" fill="hold" grpId="0" nodeType="clickEffect">
+                                  <p:stCondLst>
+                                    <p:cond delay="0"/>
+                                  </p:stCondLst>
+                                  <p:childTnLst>
+                                    <p:set>
+                                      <p:cBhvr>
+                                        <p:cTn id="11" dur="1" fill="hold">
+                                          <p:stCondLst>
+                                            <p:cond delay="0"/>
+                                          </p:stCondLst>
+                                        </p:cTn>
+                                        <p:tgtEl>
+                                          <p:spTgt spid="14">
+                                            <p:txEl>
+                                              <p:pRg st="1" end="1"/>
+                                            </p:txEl>
+                                          </p:spTgt>
+                                        </p:tgtEl>
+                                        <p:attrNameLst>
+                                          <p:attrName>style.visibility</p:attrName>
+                                        </p:attrNameLst>
+                                      </p:cBhvr>
+                                      <p:to>
+                                        <p:strVal val="visible"/>
+                                      </p:to>
+                                    </p:set>
+                                    <p:animEffect transition="in" filter="fade">
+                                      <p:cBhvr>
+                                        <p:cTn id="12" dur="500"/>
+                                        <p:tgtEl>
+                                          <p:spTgt spid="14">
+                                            <p:txEl>
+                                              <p:pRg st="1" end="1"/>
+                                            </p:txEl>
+                                          </p:spTgt>
+                                        </p:tgtEl>
+                                      </p:cBhvr>
+                                    </p:animEffect>
+                                  </p:childTnLst>
+                                </p:cTn>
+                              </p:par>
+                            </p:childTnLst>
+                          </p:cTn>
+                        </p:par>
+                      </p:childTnLst>
+                    </p:cTn>
+                  </p:par>
+                  <p:par>
+                    <p:cTn id="13" fill="hold">
+                      <p:stCondLst>
+                        <p:cond delay="indefinite"/>
+                      </p:stCondLst>
+                      <p:childTnLst>
+                        <p:par>
+                          <p:cTn id="14" fill="hold">
+                            <p:stCondLst>
+                              <p:cond delay="0"/>
+                            </p:stCondLst>
+                            <p:childTnLst>
+                              <p:par>
+                                <p:cTn id="15" presetID="10" presetClass="entr" presetSubtype="0" fill="hold" grpId="0" nodeType="clickEffect">
+                                  <p:stCondLst>
+                                    <p:cond delay="0"/>
+                                  </p:stCondLst>
+                                  <p:childTnLst>
+                                    <p:set>
+                                      <p:cBhvr>
+                                        <p:cTn id="16" dur="1" fill="hold">
+                                          <p:stCondLst>
+                                            <p:cond delay="0"/>
+                                          </p:stCondLst>
+                                        </p:cTn>
+                                        <p:tgtEl>
+                                          <p:spTgt spid="14">
+                                            <p:txEl>
+                                              <p:pRg st="2" end="2"/>
+                                            </p:txEl>
+                                          </p:spTgt>
+                                        </p:tgtEl>
+                                        <p:attrNameLst>
+                                          <p:attrName>style.visibility</p:attrName>
+                                        </p:attrNameLst>
+                                      </p:cBhvr>
+                                      <p:to>
+                                        <p:strVal val="visible"/>
+                                      </p:to>
+                                    </p:set>
+                                    <p:animEffect transition="in" filter="fade">
+                                      <p:cBhvr>
+                                        <p:cTn id="17" dur="500"/>
+                                        <p:tgtEl>
+                                          <p:spTgt spid="14">
+                                            <p:txEl>
+                                              <p:pRg st="2" end="2"/>
+                                            </p:txEl>
+                                          </p:spTgt>
+                                        </p:tgtEl>
+                                      </p:cBhvr>
+                                    </p:animEffect>
+                                  </p:childTnLst>
+                                </p:cTn>
+                              </p:par>
+                            </p:childTnLst>
+                          </p:cTn>
+                        </p:par>
+                      </p:childTnLst>
+                    </p:cTn>
+                  </p:par>
+                  <p:par>
+                    <p:cTn id="18" fill="hold">
+                      <p:stCondLst>
+                        <p:cond delay="indefinite"/>
+                      </p:stCondLst>
+                      <p:childTnLst>
+                        <p:par>
+                          <p:cTn id="19" fill="hold">
+                            <p:stCondLst>
+                              <p:cond delay="0"/>
+                            </p:stCondLst>
+                            <p:childTnLst>
+                              <p:par>
+                                <p:cTn id="20" presetID="10" presetClass="entr" presetSubtype="0" fill="hold" grpId="0" nodeType="clickEffect">
+                                  <p:stCondLst>
+                                    <p:cond delay="0"/>
+                                  </p:stCondLst>
+                                  <p:childTnLst>
+                                    <p:set>
+                                      <p:cBhvr>
+                                        <p:cTn id="21" dur="1" fill="hold">
+                                          <p:stCondLst>
+                                            <p:cond delay="0"/>
+                                          </p:stCondLst>
+                                        </p:cTn>
+                                        <p:tgtEl>
+                                          <p:spTgt spid="14">
+                                            <p:txEl>
+                                              <p:pRg st="3" end="3"/>
+                                            </p:txEl>
+                                          </p:spTgt>
+                                        </p:tgtEl>
+                                        <p:attrNameLst>
+                                          <p:attrName>style.visibility</p:attrName>
+                                        </p:attrNameLst>
+                                      </p:cBhvr>
+                                      <p:to>
+                                        <p:strVal val="visible"/>
+                                      </p:to>
+                                    </p:set>
+                                    <p:animEffect transition="in" filter="fade">
+                                      <p:cBhvr>
+                                        <p:cTn id="22" dur="500"/>
+                                        <p:tgtEl>
+                                          <p:spTgt spid="14">
+                                            <p:txEl>
+                                              <p:pRg st="3" end="3"/>
+                                            </p:txEl>
+                                          </p:spTgt>
+                                        </p:tgtEl>
+                                      </p:cBhvr>
+                                    </p:animEffect>
+                                  </p:childTnLst>
+                                </p:cTn>
+                              </p:par>
+                            </p:childTnLst>
+                          </p:cTn>
+                        </p:par>
+                      </p:childTnLst>
+                    </p:cTn>
+                  </p:par>
+                  <p:par>
+                    <p:cTn id="23" fill="hold">
+                      <p:stCondLst>
+                        <p:cond delay="indefinite"/>
+                      </p:stCondLst>
+                      <p:childTnLst>
+                        <p:par>
+                          <p:cTn id="24" fill="hold">
+                            <p:stCondLst>
+                              <p:cond delay="0"/>
+                            </p:stCondLst>
+                            <p:childTnLst>
+                              <p:par>
+                                <p:cTn id="25" presetID="10" presetClass="entr" presetSubtype="0" fill="hold" grpId="0" nodeType="clickEffect">
+                                  <p:stCondLst>
+                                    <p:cond delay="0"/>
+                                  </p:stCondLst>
+                                  <p:childTnLst>
+                                    <p:set>
+                                      <p:cBhvr>
+                                        <p:cTn id="26" dur="1" fill="hold">
+                                          <p:stCondLst>
+                                            <p:cond delay="0"/>
+                                          </p:stCondLst>
+                                        </p:cTn>
+                                        <p:tgtEl>
+                                          <p:spTgt spid="14">
+                                            <p:txEl>
+                                              <p:pRg st="4" end="4"/>
+                                            </p:txEl>
+                                          </p:spTgt>
+                                        </p:tgtEl>
+                                        <p:attrNameLst>
+                                          <p:attrName>style.visibility</p:attrName>
+                                        </p:attrNameLst>
+                                      </p:cBhvr>
+                                      <p:to>
+                                        <p:strVal val="visible"/>
+                                      </p:to>
+                                    </p:set>
+                                    <p:animEffect transition="in" filter="fade">
+                                      <p:cBhvr>
+                                        <p:cTn id="27" dur="500"/>
+                                        <p:tgtEl>
+                                          <p:spTgt spid="14">
+                                            <p:txEl>
+                                              <p:pRg st="4" end="4"/>
+                                            </p:txEl>
+                                          </p:spTgt>
+                                        </p:tgtEl>
+                                      </p:cBhvr>
+                                    </p:animEffect>
+                                  </p:childTnLst>
+                                </p:cTn>
+                              </p:par>
+                            </p:childTnLst>
+                          </p:cTn>
+                        </p:par>
+                      </p:childTnLst>
+                    </p:cTn>
+                  </p:par>
+                  <p:par>
+                    <p:cTn id="28" fill="hold">
+                      <p:stCondLst>
+                        <p:cond delay="indefinite"/>
+                      </p:stCondLst>
+                      <p:childTnLst>
+                        <p:par>
+                          <p:cTn id="29" fill="hold">
+                            <p:stCondLst>
+                              <p:cond delay="0"/>
+                            </p:stCondLst>
+                            <p:childTnLst>
+                              <p:par>
+                                <p:cTn id="30" presetID="10" presetClass="entr" presetSubtype="0" fill="hold" grpId="0" nodeType="clickEffect">
+                                  <p:stCondLst>
+                                    <p:cond delay="0"/>
+                                  </p:stCondLst>
+                                  <p:childTnLst>
+                                    <p:set>
+                                      <p:cBhvr>
+                                        <p:cTn id="31" dur="1" fill="hold">
+                                          <p:stCondLst>
+                                            <p:cond delay="0"/>
+                                          </p:stCondLst>
+                                        </p:cTn>
+                                        <p:tgtEl>
+                                          <p:spTgt spid="17"/>
+                                        </p:tgtEl>
+                                        <p:attrNameLst>
+                                          <p:attrName>style.visibility</p:attrName>
+                                        </p:attrNameLst>
+                                      </p:cBhvr>
+                                      <p:to>
+                                        <p:strVal val="visible"/>
+                                      </p:to>
+                                    </p:set>
+                                    <p:animEffect transition="in" filter="fade">
+                                      <p:cBhvr>
+                                        <p:cTn id="32" dur="500"/>
+                                        <p:tgtEl>
+                                          <p:spTgt spid="17"/>
+                                        </p:tgtEl>
+                                      </p:cBhvr>
+                                    </p:animEffect>
+                                  </p:childTnLst>
+                                </p:cTn>
+                              </p:par>
+                            </p:childTnLst>
+                          </p:cTn>
+                        </p:par>
+                      </p:childTnLst>
+                    </p:cTn>
+                  </p:par>
+                </p:childTnLst>
+              </p:cTn>
+              <p:prevCondLst>
+                <p:cond evt="onPrev" delay="0">
+                  <p:tgtEl>
+                    <p:sldTgt/>
+                  </p:tgtEl>
+                </p:cond>
+              </p:prevCondLst>
+              <p:nextCondLst>
+                <p:cond evt="onNext" delay="0">
+                  <p:tgtEl>
+                    <p:sldTgt/>
+                  </p:tgtEl>
+                </p:cond>
+              </p:nextCondLst>
+            </p:seq>
+          </p:childTnLst>
+        </p:cTn>
+      </p:par>
+    </p:tnLst>
+    <p:bldLst>
+      <p:bldP spid="14" grpId="0" build="p"/>
+      <p:bldP spid="17" grpId="0" animBg="1"/>
+    </p:bldLst>
+  </p:timing>
 </p:sld>
 </file>
 
@@ -25748,14 +26077,15 @@
         </p:nvPicPr>
         <p:blipFill>
           <a:blip r:embed="rId4"/>
+          <a:srcRect t="7933" b="7598"/>
           <a:stretch>
             <a:fillRect/>
           </a:stretch>
         </p:blipFill>
         <p:spPr>
           <a:xfrm>
-            <a:off x="3239" y="0"/>
-            <a:ext cx="12185522" cy="6858000"/>
+            <a:off x="0" y="260624"/>
+            <a:ext cx="12185522" cy="5792933"/>
           </a:xfrm>
           <a:prstGeom prst="rect">
             <a:avLst/>
